--- a/Documentation/FindFriends.pptx
+++ b/Documentation/FindFriends.pptx
@@ -2897,7 +2897,7 @@
         </p:nvSpPr>
         <p:spPr>
           <a:xfrm>
-            <a:off x="1280161" y="1234440"/>
+            <a:off x="5534057" y="1234440"/>
             <a:ext cx="2011680" cy="2011680"/>
           </a:xfrm>
           <a:prstGeom prst="ellipse">
@@ -2995,7 +2995,7 @@
         </p:nvSpPr>
         <p:spPr>
           <a:xfrm>
-            <a:off x="5486400" y="1170978"/>
+            <a:off x="1304505" y="1277907"/>
             <a:ext cx="2011680" cy="2011680"/>
           </a:xfrm>
           <a:prstGeom prst="ellipse">
@@ -3146,7 +3146,7 @@
         </p:blipFill>
         <p:spPr>
           <a:xfrm>
-            <a:off x="5529867" y="1214445"/>
+            <a:off x="1347972" y="1321374"/>
             <a:ext cx="1924746" cy="1924746"/>
           </a:xfrm>
           <a:prstGeom prst="ellipse">
@@ -3182,7 +3182,7 @@
         </p:blipFill>
         <p:spPr>
           <a:xfrm>
-            <a:off x="1368360" y="1322639"/>
+            <a:off x="5622256" y="1322639"/>
             <a:ext cx="1835281" cy="1835281"/>
           </a:xfrm>
           <a:prstGeom prst="ellipse">
